--- a/スーパーギャラクシー.pptx
+++ b/スーパーギャラクシー.pptx
@@ -7,6 +7,8 @@
   <p:sldIdLst>
     <p:sldId id="256" r:id="rId2"/>
     <p:sldId id="257" r:id="rId3"/>
+    <p:sldId id="258" r:id="rId4"/>
+    <p:sldId id="259" r:id="rId5"/>
   </p:sldIdLst>
   <p:sldSz cx="12192000" cy="6858000"/>
   <p:notesSz cx="6858000" cy="9144000"/>
@@ -105,6 +107,11 @@
       </a:defRPr>
     </a:lvl9pPr>
   </p:defaultTextStyle>
+  <p:extLst>
+    <p:ext uri="{EFAFB233-063F-42B5-8137-9DF3F51BA10A}">
+      <p15:sldGuideLst xmlns:p15="http://schemas.microsoft.com/office/powerpoint/2012/main"/>
+    </p:ext>
+  </p:extLst>
 </p:presentation>
 </file>
 
@@ -3387,6 +3394,13 @@
             <a:br>
               <a:rPr lang="en-US" altLang="ja-JP" dirty="0" smtClean="0"/>
             </a:br>
+            <a:r>
+              <a:rPr lang="en-US" altLang="ja-JP" dirty="0" smtClean="0"/>
+              <a:t/>
+            </a:r>
+            <a:br>
+              <a:rPr lang="en-US" altLang="ja-JP" dirty="0" smtClean="0"/>
+            </a:br>
             <a:endParaRPr kumimoji="1" lang="ja-JP" altLang="en-US" dirty="0"/>
           </a:p>
         </p:txBody>
@@ -3399,8 +3413,8 @@
         </p:nvSpPr>
         <p:spPr>
           <a:xfrm>
-            <a:off x="192248" y="192947"/>
-            <a:ext cx="9731229" cy="1446550"/>
+            <a:off x="368969" y="357265"/>
+            <a:ext cx="9731229" cy="1015663"/>
           </a:xfrm>
           <a:prstGeom prst="rect">
             <a:avLst/>
@@ -3414,10 +3428,10 @@
           <a:lstStyle/>
           <a:p>
             <a:r>
-              <a:rPr kumimoji="1" lang="ja-JP" altLang="en-US" sz="8800" dirty="0" smtClean="0"/>
+              <a:rPr kumimoji="1" lang="ja-JP" altLang="en-US" sz="6000" dirty="0" smtClean="0"/>
               <a:t>ゲーム概要</a:t>
             </a:r>
-            <a:endParaRPr kumimoji="1" lang="ja-JP" altLang="en-US" sz="8800" dirty="0"/>
+            <a:endParaRPr kumimoji="1" lang="ja-JP" altLang="en-US" sz="6000" dirty="0"/>
           </a:p>
         </p:txBody>
       </p:sp>
@@ -3431,8 +3445,8 @@
         </p:nvSpPr>
         <p:spPr bwMode="auto">
           <a:xfrm>
-            <a:off x="513348" y="2155455"/>
-            <a:ext cx="8209299" cy="3108543"/>
+            <a:off x="368969" y="1544550"/>
+            <a:ext cx="7263527" cy="4893647"/>
           </a:xfrm>
           <a:prstGeom prst="rect">
             <a:avLst/>
@@ -3492,12 +3506,10 @@
               </a:spcAft>
               <a:buClrTx/>
               <a:buSzTx/>
-              <a:buFontTx/>
-              <a:buChar char="•"/>
               <a:tabLst/>
             </a:pPr>
             <a:r>
-              <a:rPr kumimoji="0" lang="ja-JP" altLang="ja-JP" sz="2800" b="0" i="0" u="none" strike="noStrike" cap="none" normalizeH="0" baseline="0" dirty="0" smtClean="0">
+              <a:rPr kumimoji="0" lang="ja-JP" altLang="en-US" sz="2400" i="0" u="none" strike="noStrike" cap="none" normalizeH="0" baseline="0" dirty="0" smtClean="0">
                 <a:ln>
                   <a:noFill/>
                 </a:ln>
@@ -3507,8 +3519,57 @@
                 <a:effectLst/>
                 <a:latin typeface="Arial" panose="020B0604020202020204" pitchFamily="34" charset="0"/>
               </a:rPr>
-              <a:t>全員が宇宙艇からスタート</a:t>
-            </a:r>
+              <a:t>・</a:t>
+            </a:r>
+            <a:r>
+              <a:rPr kumimoji="0" lang="ja-JP" altLang="ja-JP" sz="2400" i="0" u="none" strike="noStrike" cap="none" normalizeH="0" baseline="0" dirty="0" smtClean="0">
+                <a:ln>
+                  <a:noFill/>
+                </a:ln>
+                <a:solidFill>
+                  <a:schemeClr val="tx1"/>
+                </a:solidFill>
+                <a:effectLst/>
+                <a:latin typeface="Arial" panose="020B0604020202020204" pitchFamily="34" charset="0"/>
+              </a:rPr>
+              <a:t>全員</a:t>
+            </a:r>
+            <a:r>
+              <a:rPr kumimoji="0" lang="ja-JP" altLang="ja-JP" sz="2400" i="0" u="none" strike="noStrike" cap="none" normalizeH="0" baseline="0" dirty="0" smtClean="0">
+                <a:ln>
+                  <a:noFill/>
+                </a:ln>
+                <a:solidFill>
+                  <a:schemeClr val="tx1"/>
+                </a:solidFill>
+                <a:effectLst/>
+                <a:latin typeface="Arial" panose="020B0604020202020204" pitchFamily="34" charset="0"/>
+              </a:rPr>
+              <a:t>が宇宙艇から</a:t>
+            </a:r>
+            <a:r>
+              <a:rPr kumimoji="0" lang="ja-JP" altLang="ja-JP" sz="2400" i="0" u="none" strike="noStrike" cap="none" normalizeH="0" baseline="0" dirty="0" smtClean="0">
+                <a:ln>
+                  <a:noFill/>
+                </a:ln>
+                <a:solidFill>
+                  <a:schemeClr val="tx1"/>
+                </a:solidFill>
+                <a:effectLst/>
+                <a:latin typeface="Arial" panose="020B0604020202020204" pitchFamily="34" charset="0"/>
+              </a:rPr>
+              <a:t>スタート</a:t>
+            </a:r>
+            <a:endParaRPr kumimoji="0" lang="en-US" altLang="ja-JP" sz="2400" i="0" u="none" strike="noStrike" cap="none" normalizeH="0" baseline="0" dirty="0" smtClean="0">
+              <a:ln>
+                <a:noFill/>
+              </a:ln>
+              <a:solidFill>
+                <a:schemeClr val="tx1"/>
+              </a:solidFill>
+              <a:effectLst/>
+              <a:latin typeface="Arial" panose="020B0604020202020204" pitchFamily="34" charset="0"/>
+            </a:endParaRPr>
           </a:p>
           <a:p>
             <a:pPr marL="0" marR="0" lvl="0" indent="0" algn="l" defTabSz="914400" rtl="0" eaLnBrk="0" fontAlgn="base" latinLnBrk="0" hangingPunct="0">
@@ -3523,23 +3584,18 @@
               </a:spcAft>
               <a:buClrTx/>
               <a:buSzTx/>
-              <a:buFontTx/>
-              <a:buChar char="•"/>
               <a:tabLst/>
             </a:pPr>
-            <a:r>
-              <a:rPr kumimoji="0" lang="ja-JP" altLang="ja-JP" sz="2800" b="0" i="0" u="none" strike="noStrike" cap="none" normalizeH="0" baseline="0" dirty="0" smtClean="0">
-                <a:ln>
-                  <a:noFill/>
-                </a:ln>
-                <a:solidFill>
-                  <a:schemeClr val="tx1"/>
-                </a:solidFill>
-                <a:effectLst/>
-                <a:latin typeface="Arial" panose="020B0604020202020204" pitchFamily="34" charset="0"/>
-              </a:rPr>
-              <a:t>サイコロで進み、エネルギーコアを拾う</a:t>
-            </a:r>
+            <a:endParaRPr kumimoji="0" lang="ja-JP" altLang="ja-JP" sz="2400" i="0" u="none" strike="noStrike" cap="none" normalizeH="0" baseline="0" dirty="0" smtClean="0">
+              <a:ln>
+                <a:noFill/>
+              </a:ln>
+              <a:solidFill>
+                <a:schemeClr val="tx1"/>
+              </a:solidFill>
+              <a:effectLst/>
+              <a:latin typeface="Arial" panose="020B0604020202020204" pitchFamily="34" charset="0"/>
+            </a:endParaRPr>
           </a:p>
           <a:p>
             <a:pPr marL="0" marR="0" lvl="0" indent="0" algn="l" defTabSz="914400" rtl="0" eaLnBrk="0" fontAlgn="base" latinLnBrk="0" hangingPunct="0">
@@ -3554,12 +3610,10 @@
               </a:spcAft>
               <a:buClrTx/>
               <a:buSzTx/>
-              <a:buFontTx/>
-              <a:buChar char="•"/>
               <a:tabLst/>
             </a:pPr>
             <a:r>
-              <a:rPr kumimoji="0" lang="ja-JP" altLang="ja-JP" sz="2800" b="0" i="0" u="none" strike="noStrike" cap="none" normalizeH="0" baseline="0" dirty="0" smtClean="0">
+              <a:rPr kumimoji="0" lang="ja-JP" altLang="en-US" sz="2400" i="0" u="none" strike="noStrike" cap="none" normalizeH="0" baseline="0" dirty="0" smtClean="0">
                 <a:ln>
                   <a:noFill/>
                 </a:ln>
@@ -3569,8 +3623,57 @@
                 <a:effectLst/>
                 <a:latin typeface="Arial" panose="020B0604020202020204" pitchFamily="34" charset="0"/>
               </a:rPr>
-              <a:t>拾うほど移動が遅くなる</a:t>
-            </a:r>
+              <a:t>・</a:t>
+            </a:r>
+            <a:r>
+              <a:rPr kumimoji="0" lang="ja-JP" altLang="ja-JP" sz="2400" i="0" u="none" strike="noStrike" cap="none" normalizeH="0" baseline="0" dirty="0" smtClean="0">
+                <a:ln>
+                  <a:noFill/>
+                </a:ln>
+                <a:solidFill>
+                  <a:schemeClr val="tx1"/>
+                </a:solidFill>
+                <a:effectLst/>
+                <a:latin typeface="Arial" panose="020B0604020202020204" pitchFamily="34" charset="0"/>
+              </a:rPr>
+              <a:t>サイコロ</a:t>
+            </a:r>
+            <a:r>
+              <a:rPr kumimoji="0" lang="ja-JP" altLang="ja-JP" sz="2400" i="0" u="none" strike="noStrike" cap="none" normalizeH="0" baseline="0" dirty="0" smtClean="0">
+                <a:ln>
+                  <a:noFill/>
+                </a:ln>
+                <a:solidFill>
+                  <a:schemeClr val="tx1"/>
+                </a:solidFill>
+                <a:effectLst/>
+                <a:latin typeface="Arial" panose="020B0604020202020204" pitchFamily="34" charset="0"/>
+              </a:rPr>
+              <a:t>で進み、エネルギーコアを</a:t>
+            </a:r>
+            <a:r>
+              <a:rPr kumimoji="0" lang="ja-JP" altLang="ja-JP" sz="2400" i="0" u="none" strike="noStrike" cap="none" normalizeH="0" baseline="0" dirty="0" smtClean="0">
+                <a:ln>
+                  <a:noFill/>
+                </a:ln>
+                <a:solidFill>
+                  <a:schemeClr val="tx1"/>
+                </a:solidFill>
+                <a:effectLst/>
+                <a:latin typeface="Arial" panose="020B0604020202020204" pitchFamily="34" charset="0"/>
+              </a:rPr>
+              <a:t>拾う</a:t>
+            </a:r>
+            <a:endParaRPr kumimoji="0" lang="en-US" altLang="ja-JP" sz="2400" i="0" u="none" strike="noStrike" cap="none" normalizeH="0" baseline="0" dirty="0" smtClean="0">
+              <a:ln>
+                <a:noFill/>
+              </a:ln>
+              <a:solidFill>
+                <a:schemeClr val="tx1"/>
+              </a:solidFill>
+              <a:effectLst/>
+              <a:latin typeface="Arial" panose="020B0604020202020204" pitchFamily="34" charset="0"/>
+            </a:endParaRPr>
           </a:p>
           <a:p>
             <a:pPr marL="0" marR="0" lvl="0" indent="0" algn="l" defTabSz="914400" rtl="0" eaLnBrk="0" fontAlgn="base" latinLnBrk="0" hangingPunct="0">
@@ -3585,23 +3688,18 @@
               </a:spcAft>
               <a:buClrTx/>
               <a:buSzTx/>
-              <a:buFontTx/>
-              <a:buChar char="•"/>
               <a:tabLst/>
             </a:pPr>
-            <a:r>
-              <a:rPr kumimoji="0" lang="ja-JP" altLang="ja-JP" sz="2800" b="0" i="0" u="none" strike="noStrike" cap="none" normalizeH="0" baseline="0" dirty="0" smtClean="0">
-                <a:ln>
-                  <a:noFill/>
-                </a:ln>
-                <a:solidFill>
-                  <a:schemeClr val="tx1"/>
-                </a:solidFill>
-                <a:effectLst/>
-                <a:latin typeface="Arial" panose="020B0604020202020204" pitchFamily="34" charset="0"/>
-              </a:rPr>
-              <a:t>シールド残量と残りターン数を見ながら帰還判断</a:t>
-            </a:r>
+            <a:endParaRPr kumimoji="0" lang="ja-JP" altLang="ja-JP" sz="2400" i="0" u="none" strike="noStrike" cap="none" normalizeH="0" baseline="0" dirty="0" smtClean="0">
+              <a:ln>
+                <a:noFill/>
+              </a:ln>
+              <a:solidFill>
+                <a:schemeClr val="tx1"/>
+              </a:solidFill>
+              <a:effectLst/>
+              <a:latin typeface="Arial" panose="020B0604020202020204" pitchFamily="34" charset="0"/>
+            </a:endParaRPr>
           </a:p>
           <a:p>
             <a:pPr marL="0" marR="0" lvl="0" indent="0" algn="l" defTabSz="914400" rtl="0" eaLnBrk="0" fontAlgn="base" latinLnBrk="0" hangingPunct="0">
@@ -3616,12 +3714,10 @@
               </a:spcAft>
               <a:buClrTx/>
               <a:buSzTx/>
-              <a:buFontTx/>
-              <a:buChar char="•"/>
               <a:tabLst/>
             </a:pPr>
             <a:r>
-              <a:rPr kumimoji="0" lang="ja-JP" altLang="ja-JP" sz="2800" b="0" i="0" u="none" strike="noStrike" cap="none" normalizeH="0" baseline="0" dirty="0" smtClean="0">
+              <a:rPr kumimoji="0" lang="ja-JP" altLang="en-US" sz="2400" i="0" u="none" strike="noStrike" cap="none" normalizeH="0" baseline="0" dirty="0" smtClean="0">
                 <a:ln>
                   <a:noFill/>
                 </a:ln>
@@ -3631,8 +3727,57 @@
                 <a:effectLst/>
                 <a:latin typeface="Arial" panose="020B0604020202020204" pitchFamily="34" charset="0"/>
               </a:rPr>
-              <a:t>宇宙艇に戻れれば得点</a:t>
-            </a:r>
+              <a:t>・</a:t>
+            </a:r>
+            <a:r>
+              <a:rPr kumimoji="0" lang="ja-JP" altLang="ja-JP" sz="2400" i="0" u="none" strike="noStrike" cap="none" normalizeH="0" baseline="0" dirty="0" smtClean="0">
+                <a:ln>
+                  <a:noFill/>
+                </a:ln>
+                <a:solidFill>
+                  <a:schemeClr val="tx1"/>
+                </a:solidFill>
+                <a:effectLst/>
+                <a:latin typeface="Arial" panose="020B0604020202020204" pitchFamily="34" charset="0"/>
+              </a:rPr>
+              <a:t>拾う</a:t>
+            </a:r>
+            <a:r>
+              <a:rPr kumimoji="0" lang="ja-JP" altLang="ja-JP" sz="2400" i="0" u="none" strike="noStrike" cap="none" normalizeH="0" baseline="0" dirty="0" smtClean="0">
+                <a:ln>
+                  <a:noFill/>
+                </a:ln>
+                <a:solidFill>
+                  <a:schemeClr val="tx1"/>
+                </a:solidFill>
+                <a:effectLst/>
+                <a:latin typeface="Arial" panose="020B0604020202020204" pitchFamily="34" charset="0"/>
+              </a:rPr>
+              <a:t>ほど移動が遅く</a:t>
+            </a:r>
+            <a:r>
+              <a:rPr kumimoji="0" lang="ja-JP" altLang="ja-JP" sz="2400" i="0" u="none" strike="noStrike" cap="none" normalizeH="0" baseline="0" dirty="0" smtClean="0">
+                <a:ln>
+                  <a:noFill/>
+                </a:ln>
+                <a:solidFill>
+                  <a:schemeClr val="tx1"/>
+                </a:solidFill>
+                <a:effectLst/>
+                <a:latin typeface="Arial" panose="020B0604020202020204" pitchFamily="34" charset="0"/>
+              </a:rPr>
+              <a:t>なる</a:t>
+            </a:r>
+            <a:endParaRPr kumimoji="0" lang="en-US" altLang="ja-JP" sz="2400" i="0" u="none" strike="noStrike" cap="none" normalizeH="0" baseline="0" dirty="0" smtClean="0">
+              <a:ln>
+                <a:noFill/>
+              </a:ln>
+              <a:solidFill>
+                <a:schemeClr val="tx1"/>
+              </a:solidFill>
+              <a:effectLst/>
+              <a:latin typeface="Arial" panose="020B0604020202020204" pitchFamily="34" charset="0"/>
+            </a:endParaRPr>
           </a:p>
           <a:p>
             <a:pPr marL="0" marR="0" lvl="0" indent="0" algn="l" defTabSz="914400" rtl="0" eaLnBrk="0" fontAlgn="base" latinLnBrk="0" hangingPunct="0">
@@ -3647,12 +3792,36 @@
               </a:spcAft>
               <a:buClrTx/>
               <a:buSzTx/>
-              <a:buFontTx/>
-              <a:buChar char="•"/>
               <a:tabLst/>
             </a:pPr>
-            <a:r>
-              <a:rPr kumimoji="0" lang="ja-JP" altLang="ja-JP" sz="2800" b="0" i="0" u="none" strike="noStrike" cap="none" normalizeH="0" baseline="0" dirty="0" smtClean="0">
+            <a:endParaRPr kumimoji="0" lang="ja-JP" altLang="ja-JP" sz="2400" i="0" u="none" strike="noStrike" cap="none" normalizeH="0" baseline="0" dirty="0" smtClean="0">
+              <a:ln>
+                <a:noFill/>
+              </a:ln>
+              <a:solidFill>
+                <a:schemeClr val="tx1"/>
+              </a:solidFill>
+              <a:effectLst/>
+              <a:latin typeface="Arial" panose="020B0604020202020204" pitchFamily="34" charset="0"/>
+            </a:endParaRPr>
+          </a:p>
+          <a:p>
+            <a:pPr marL="0" marR="0" lvl="0" indent="0" algn="l" defTabSz="914400" rtl="0" eaLnBrk="0" fontAlgn="base" latinLnBrk="0" hangingPunct="0">
+              <a:lnSpc>
+                <a:spcPct val="100000"/>
+              </a:lnSpc>
+              <a:spcBef>
+                <a:spcPct val="0"/>
+              </a:spcBef>
+              <a:spcAft>
+                <a:spcPct val="0"/>
+              </a:spcAft>
+              <a:buClrTx/>
+              <a:buSzTx/>
+              <a:tabLst/>
+            </a:pPr>
+            <a:r>
+              <a:rPr kumimoji="0" lang="ja-JP" altLang="en-US" sz="2400" i="0" u="none" strike="noStrike" cap="none" normalizeH="0" baseline="0" dirty="0" smtClean="0">
                 <a:ln>
                   <a:noFill/>
                 </a:ln>
@@ -3662,9 +3831,48 @@
                 <a:effectLst/>
                 <a:latin typeface="Arial" panose="020B0604020202020204" pitchFamily="34" charset="0"/>
               </a:rPr>
-              <a:t>3ラウンドの合計で勝敗</a:t>
-            </a:r>
-            <a:endParaRPr kumimoji="0" lang="en-US" altLang="ja-JP" sz="2800" b="0" i="0" u="none" strike="noStrike" cap="none" normalizeH="0" baseline="0" dirty="0" smtClean="0">
+              <a:t>・</a:t>
+            </a:r>
+            <a:r>
+              <a:rPr kumimoji="0" lang="ja-JP" altLang="ja-JP" sz="2400" i="0" u="none" strike="noStrike" cap="none" normalizeH="0" baseline="0" dirty="0" smtClean="0">
+                <a:ln>
+                  <a:noFill/>
+                </a:ln>
+                <a:solidFill>
+                  <a:schemeClr val="tx1"/>
+                </a:solidFill>
+                <a:effectLst/>
+                <a:latin typeface="Arial" panose="020B0604020202020204" pitchFamily="34" charset="0"/>
+              </a:rPr>
+              <a:t>シールド</a:t>
+            </a:r>
+            <a:r>
+              <a:rPr kumimoji="0" lang="ja-JP" altLang="ja-JP" sz="2400" i="0" u="none" strike="noStrike" cap="none" normalizeH="0" baseline="0" dirty="0" smtClean="0">
+                <a:ln>
+                  <a:noFill/>
+                </a:ln>
+                <a:solidFill>
+                  <a:schemeClr val="tx1"/>
+                </a:solidFill>
+                <a:effectLst/>
+                <a:latin typeface="Arial" panose="020B0604020202020204" pitchFamily="34" charset="0"/>
+              </a:rPr>
+              <a:t>残量と残りターン数を見ながら帰還</a:t>
+            </a:r>
+            <a:r>
+              <a:rPr kumimoji="0" lang="ja-JP" altLang="ja-JP" sz="2400" i="0" u="none" strike="noStrike" cap="none" normalizeH="0" baseline="0" dirty="0" smtClean="0">
+                <a:ln>
+                  <a:noFill/>
+                </a:ln>
+                <a:solidFill>
+                  <a:schemeClr val="tx1"/>
+                </a:solidFill>
+                <a:effectLst/>
+                <a:latin typeface="Arial" panose="020B0604020202020204" pitchFamily="34" charset="0"/>
+              </a:rPr>
+              <a:t>判断</a:t>
+            </a:r>
+            <a:endParaRPr kumimoji="0" lang="en-US" altLang="ja-JP" sz="2400" i="0" u="none" strike="noStrike" cap="none" normalizeH="0" baseline="0" dirty="0" smtClean="0">
               <a:ln>
                 <a:noFill/>
               </a:ln>
@@ -3676,21 +3884,21 @@
             </a:endParaRPr>
           </a:p>
           <a:p>
-            <a:pPr lvl="0" eaLnBrk="0" fontAlgn="base" hangingPunct="0">
+            <a:pPr marL="0" marR="0" lvl="0" indent="0" algn="l" defTabSz="914400" rtl="0" eaLnBrk="0" fontAlgn="base" latinLnBrk="0" hangingPunct="0">
+              <a:lnSpc>
+                <a:spcPct val="100000"/>
+              </a:lnSpc>
               <a:spcBef>
                 <a:spcPct val="0"/>
               </a:spcBef>
               <a:spcAft>
                 <a:spcPct val="0"/>
               </a:spcAft>
-              <a:buFontTx/>
-              <a:buChar char="•"/>
+              <a:buClrTx/>
+              <a:buSzTx/>
+              <a:tabLst/>
             </a:pPr>
-            <a:r>
-              <a:rPr lang="ja-JP" altLang="en-US" sz="2800" dirty="0" smtClean="0"/>
-              <a:t>残りターン数をポイントに</a:t>
-            </a:r>
-            <a:endParaRPr kumimoji="0" lang="ja-JP" altLang="ja-JP" sz="2800" b="0" i="0" u="none" strike="noStrike" cap="none" normalizeH="0" baseline="0" dirty="0" smtClean="0">
+            <a:endParaRPr kumimoji="0" lang="ja-JP" altLang="ja-JP" sz="2400" i="0" u="none" strike="noStrike" cap="none" normalizeH="0" baseline="0" dirty="0" smtClean="0">
               <a:ln>
                 <a:noFill/>
               </a:ln>
@@ -3701,12 +3909,450 @@
               <a:latin typeface="Arial" panose="020B0604020202020204" pitchFamily="34" charset="0"/>
             </a:endParaRPr>
           </a:p>
+          <a:p>
+            <a:pPr marL="0" marR="0" lvl="0" indent="0" algn="l" defTabSz="914400" rtl="0" eaLnBrk="0" fontAlgn="base" latinLnBrk="0" hangingPunct="0">
+              <a:lnSpc>
+                <a:spcPct val="100000"/>
+              </a:lnSpc>
+              <a:spcBef>
+                <a:spcPct val="0"/>
+              </a:spcBef>
+              <a:spcAft>
+                <a:spcPct val="0"/>
+              </a:spcAft>
+              <a:buClrTx/>
+              <a:buSzTx/>
+              <a:tabLst/>
+            </a:pPr>
+            <a:r>
+              <a:rPr kumimoji="0" lang="ja-JP" altLang="en-US" sz="2400" i="0" u="none" strike="noStrike" cap="none" normalizeH="0" baseline="0" dirty="0" smtClean="0">
+                <a:ln>
+                  <a:noFill/>
+                </a:ln>
+                <a:solidFill>
+                  <a:schemeClr val="tx1"/>
+                </a:solidFill>
+                <a:effectLst/>
+                <a:latin typeface="Arial" panose="020B0604020202020204" pitchFamily="34" charset="0"/>
+              </a:rPr>
+              <a:t>・</a:t>
+            </a:r>
+            <a:r>
+              <a:rPr kumimoji="0" lang="ja-JP" altLang="ja-JP" sz="2400" i="0" u="none" strike="noStrike" cap="none" normalizeH="0" baseline="0" dirty="0" smtClean="0">
+                <a:ln>
+                  <a:noFill/>
+                </a:ln>
+                <a:solidFill>
+                  <a:schemeClr val="tx1"/>
+                </a:solidFill>
+                <a:effectLst/>
+                <a:latin typeface="Arial" panose="020B0604020202020204" pitchFamily="34" charset="0"/>
+              </a:rPr>
+              <a:t>宇宙</a:t>
+            </a:r>
+            <a:r>
+              <a:rPr kumimoji="0" lang="ja-JP" altLang="ja-JP" sz="2400" i="0" u="none" strike="noStrike" cap="none" normalizeH="0" baseline="0" dirty="0" smtClean="0">
+                <a:ln>
+                  <a:noFill/>
+                </a:ln>
+                <a:solidFill>
+                  <a:schemeClr val="tx1"/>
+                </a:solidFill>
+                <a:effectLst/>
+                <a:latin typeface="Arial" panose="020B0604020202020204" pitchFamily="34" charset="0"/>
+              </a:rPr>
+              <a:t>艇に戻れれば</a:t>
+            </a:r>
+            <a:r>
+              <a:rPr kumimoji="0" lang="ja-JP" altLang="ja-JP" sz="2400" i="0" u="none" strike="noStrike" cap="none" normalizeH="0" baseline="0" dirty="0" smtClean="0">
+                <a:ln>
+                  <a:noFill/>
+                </a:ln>
+                <a:solidFill>
+                  <a:schemeClr val="tx1"/>
+                </a:solidFill>
+                <a:effectLst/>
+                <a:latin typeface="Arial" panose="020B0604020202020204" pitchFamily="34" charset="0"/>
+              </a:rPr>
+              <a:t>得点</a:t>
+            </a:r>
+            <a:endParaRPr kumimoji="0" lang="en-US" altLang="ja-JP" sz="2400" i="0" u="none" strike="noStrike" cap="none" normalizeH="0" baseline="0" dirty="0" smtClean="0">
+              <a:ln>
+                <a:noFill/>
+              </a:ln>
+              <a:solidFill>
+                <a:schemeClr val="tx1"/>
+              </a:solidFill>
+              <a:effectLst/>
+              <a:latin typeface="Arial" panose="020B0604020202020204" pitchFamily="34" charset="0"/>
+            </a:endParaRPr>
+          </a:p>
+          <a:p>
+            <a:pPr marL="0" marR="0" lvl="0" indent="0" algn="l" defTabSz="914400" rtl="0" eaLnBrk="0" fontAlgn="base" latinLnBrk="0" hangingPunct="0">
+              <a:lnSpc>
+                <a:spcPct val="100000"/>
+              </a:lnSpc>
+              <a:spcBef>
+                <a:spcPct val="0"/>
+              </a:spcBef>
+              <a:spcAft>
+                <a:spcPct val="0"/>
+              </a:spcAft>
+              <a:buClrTx/>
+              <a:buSzTx/>
+              <a:tabLst/>
+            </a:pPr>
+            <a:endParaRPr kumimoji="0" lang="ja-JP" altLang="ja-JP" sz="2400" i="0" u="none" strike="noStrike" cap="none" normalizeH="0" baseline="0" dirty="0" smtClean="0">
+              <a:ln>
+                <a:noFill/>
+              </a:ln>
+              <a:solidFill>
+                <a:schemeClr val="tx1"/>
+              </a:solidFill>
+              <a:effectLst/>
+              <a:latin typeface="Arial" panose="020B0604020202020204" pitchFamily="34" charset="0"/>
+            </a:endParaRPr>
+          </a:p>
+          <a:p>
+            <a:pPr marL="0" marR="0" lvl="0" indent="0" algn="l" defTabSz="914400" rtl="0" eaLnBrk="0" fontAlgn="base" latinLnBrk="0" hangingPunct="0">
+              <a:lnSpc>
+                <a:spcPct val="100000"/>
+              </a:lnSpc>
+              <a:spcBef>
+                <a:spcPct val="0"/>
+              </a:spcBef>
+              <a:spcAft>
+                <a:spcPct val="0"/>
+              </a:spcAft>
+              <a:buClrTx/>
+              <a:buSzTx/>
+              <a:tabLst/>
+            </a:pPr>
+            <a:r>
+              <a:rPr kumimoji="0" lang="ja-JP" altLang="en-US" sz="2400" i="0" u="none" strike="noStrike" cap="none" normalizeH="0" baseline="0" dirty="0" smtClean="0">
+                <a:ln>
+                  <a:noFill/>
+                </a:ln>
+                <a:solidFill>
+                  <a:schemeClr val="tx1"/>
+                </a:solidFill>
+                <a:effectLst/>
+                <a:latin typeface="Arial" panose="020B0604020202020204" pitchFamily="34" charset="0"/>
+              </a:rPr>
+              <a:t>・</a:t>
+            </a:r>
+            <a:r>
+              <a:rPr kumimoji="0" lang="ja-JP" altLang="ja-JP" sz="2400" i="0" u="none" strike="noStrike" cap="none" normalizeH="0" baseline="0" dirty="0" smtClean="0">
+                <a:ln>
+                  <a:noFill/>
+                </a:ln>
+                <a:solidFill>
+                  <a:schemeClr val="tx1"/>
+                </a:solidFill>
+                <a:effectLst/>
+                <a:latin typeface="Arial" panose="020B0604020202020204" pitchFamily="34" charset="0"/>
+              </a:rPr>
+              <a:t>3</a:t>
+            </a:r>
+            <a:r>
+              <a:rPr kumimoji="0" lang="ja-JP" altLang="ja-JP" sz="2400" i="0" u="none" strike="noStrike" cap="none" normalizeH="0" baseline="0" dirty="0" smtClean="0">
+                <a:ln>
+                  <a:noFill/>
+                </a:ln>
+                <a:solidFill>
+                  <a:schemeClr val="tx1"/>
+                </a:solidFill>
+                <a:effectLst/>
+                <a:latin typeface="Arial" panose="020B0604020202020204" pitchFamily="34" charset="0"/>
+              </a:rPr>
+              <a:t>ラウンドの合計で</a:t>
+            </a:r>
+            <a:r>
+              <a:rPr kumimoji="0" lang="ja-JP" altLang="ja-JP" sz="2400" i="0" u="none" strike="noStrike" cap="none" normalizeH="0" baseline="0" dirty="0" smtClean="0">
+                <a:ln>
+                  <a:noFill/>
+                </a:ln>
+                <a:solidFill>
+                  <a:schemeClr val="tx1"/>
+                </a:solidFill>
+                <a:effectLst/>
+                <a:latin typeface="Arial" panose="020B0604020202020204" pitchFamily="34" charset="0"/>
+              </a:rPr>
+              <a:t>勝敗</a:t>
+            </a:r>
+            <a:endParaRPr kumimoji="0" lang="en-US" altLang="ja-JP" sz="2400" i="0" u="none" strike="noStrike" cap="none" normalizeH="0" baseline="0" dirty="0" smtClean="0">
+              <a:ln>
+                <a:noFill/>
+              </a:ln>
+              <a:solidFill>
+                <a:schemeClr val="tx1"/>
+              </a:solidFill>
+              <a:effectLst/>
+              <a:latin typeface="Arial" panose="020B0604020202020204" pitchFamily="34" charset="0"/>
+            </a:endParaRPr>
+          </a:p>
+          <a:p>
+            <a:pPr marL="0" marR="0" lvl="0" indent="0" algn="l" defTabSz="914400" rtl="0" eaLnBrk="0" fontAlgn="base" latinLnBrk="0" hangingPunct="0">
+              <a:lnSpc>
+                <a:spcPct val="100000"/>
+              </a:lnSpc>
+              <a:spcBef>
+                <a:spcPct val="0"/>
+              </a:spcBef>
+              <a:spcAft>
+                <a:spcPct val="0"/>
+              </a:spcAft>
+              <a:buClrTx/>
+              <a:buSzTx/>
+              <a:tabLst/>
+            </a:pPr>
+            <a:endParaRPr kumimoji="0" lang="en-US" altLang="ja-JP" sz="2400" i="0" u="none" strike="noStrike" cap="none" normalizeH="0" baseline="0" dirty="0" smtClean="0">
+              <a:ln>
+                <a:noFill/>
+              </a:ln>
+              <a:solidFill>
+                <a:schemeClr val="tx1"/>
+              </a:solidFill>
+              <a:effectLst/>
+              <a:latin typeface="Arial" panose="020B0604020202020204" pitchFamily="34" charset="0"/>
+            </a:endParaRPr>
+          </a:p>
+          <a:p>
+            <a:pPr lvl="0" eaLnBrk="0" fontAlgn="base" hangingPunct="0">
+              <a:spcBef>
+                <a:spcPct val="0"/>
+              </a:spcBef>
+              <a:spcAft>
+                <a:spcPct val="0"/>
+              </a:spcAft>
+            </a:pPr>
+            <a:r>
+              <a:rPr lang="ja-JP" altLang="en-US" sz="2400" dirty="0" smtClean="0"/>
+              <a:t>・残り</a:t>
+            </a:r>
+            <a:r>
+              <a:rPr lang="ja-JP" altLang="en-US" sz="2400" dirty="0" smtClean="0"/>
+              <a:t>ターン数をポイントに</a:t>
+            </a:r>
+            <a:endParaRPr kumimoji="0" lang="ja-JP" altLang="ja-JP" sz="2400" i="0" u="none" strike="noStrike" cap="none" normalizeH="0" baseline="0" dirty="0" smtClean="0">
+              <a:ln>
+                <a:noFill/>
+              </a:ln>
+              <a:solidFill>
+                <a:schemeClr val="tx1"/>
+              </a:solidFill>
+              <a:effectLst/>
+              <a:latin typeface="Arial" panose="020B0604020202020204" pitchFamily="34" charset="0"/>
+            </a:endParaRPr>
+          </a:p>
         </p:txBody>
       </p:sp>
     </p:spTree>
     <p:extLst>
       <p:ext uri="{BB962C8B-B14F-4D97-AF65-F5344CB8AC3E}">
         <p14:creationId xmlns:p14="http://schemas.microsoft.com/office/powerpoint/2010/main" val="3391318612"/>
+      </p:ext>
+    </p:extLst>
+  </p:cSld>
+  <p:clrMapOvr>
+    <a:masterClrMapping/>
+  </p:clrMapOvr>
+</p:sld>
+</file>
+
+<file path=ppt/slides/slide3.xml><?xml version="1.0" encoding="utf-8"?>
+<p:sld xmlns:a="http://schemas.openxmlformats.org/drawingml/2006/main" xmlns:r="http://schemas.openxmlformats.org/officeDocument/2006/relationships" xmlns:p="http://schemas.openxmlformats.org/presentationml/2006/main">
+  <p:cSld>
+    <p:spTree>
+      <p:nvGrpSpPr>
+        <p:cNvPr id="1" name=""/>
+        <p:cNvGrpSpPr/>
+        <p:nvPr/>
+      </p:nvGrpSpPr>
+      <p:grpSpPr>
+        <a:xfrm>
+          <a:off x="0" y="0"/>
+          <a:ext cx="0" cy="0"/>
+          <a:chOff x="0" y="0"/>
+          <a:chExt cx="0" cy="0"/>
+        </a:xfrm>
+      </p:grpSpPr>
+      <p:sp>
+        <p:nvSpPr>
+          <p:cNvPr id="2" name="タイトル 1"/>
+          <p:cNvSpPr>
+            <a:spLocks noGrp="1"/>
+          </p:cNvSpPr>
+          <p:nvPr>
+            <p:ph type="ctrTitle"/>
+          </p:nvPr>
+        </p:nvSpPr>
+        <p:spPr>
+          <a:xfrm>
+            <a:off x="535616" y="478674"/>
+            <a:ext cx="4864100" cy="1138237"/>
+          </a:xfrm>
+        </p:spPr>
+        <p:txBody>
+          <a:bodyPr/>
+          <a:lstStyle/>
+          <a:p>
+            <a:r>
+              <a:rPr kumimoji="1" lang="ja-JP" altLang="en-US" dirty="0" smtClean="0"/>
+              <a:t>おもしろさ</a:t>
+            </a:r>
+            <a:endParaRPr kumimoji="1" lang="ja-JP" altLang="en-US" dirty="0"/>
+          </a:p>
+        </p:txBody>
+      </p:sp>
+      <p:sp>
+        <p:nvSpPr>
+          <p:cNvPr id="4" name="テキスト ボックス 3"/>
+          <p:cNvSpPr txBox="1"/>
+          <p:nvPr/>
+        </p:nvSpPr>
+        <p:spPr>
+          <a:xfrm>
+            <a:off x="1129174" y="2133600"/>
+            <a:ext cx="8956298" cy="3970318"/>
+          </a:xfrm>
+          <a:prstGeom prst="rect">
+            <a:avLst/>
+          </a:prstGeom>
+          <a:noFill/>
+        </p:spPr>
+        <p:txBody>
+          <a:bodyPr wrap="none" rtlCol="0">
+            <a:spAutoFit/>
+          </a:bodyPr>
+          <a:lstStyle/>
+          <a:p>
+            <a:r>
+              <a:rPr lang="ja-JP" altLang="en-US" sz="3600" dirty="0"/>
+              <a:t>欲張るほど動けなくなる</a:t>
+            </a:r>
+            <a:r>
+              <a:rPr lang="ja-JP" altLang="en-US" sz="3600" dirty="0" smtClean="0"/>
+              <a:t>ジレンマ</a:t>
+            </a:r>
+            <a:r>
+              <a:rPr lang="en-US" altLang="ja-JP" sz="3600" dirty="0" smtClean="0"/>
+              <a:t/>
+            </a:r>
+            <a:br>
+              <a:rPr lang="en-US" altLang="ja-JP" sz="3600" dirty="0" smtClean="0"/>
+            </a:br>
+            <a:r>
+              <a:rPr lang="en-US" altLang="ja-JP" sz="3600" dirty="0" smtClean="0"/>
+              <a:t/>
+            </a:r>
+            <a:br>
+              <a:rPr lang="en-US" altLang="ja-JP" sz="3600" dirty="0" smtClean="0"/>
+            </a:br>
+            <a:r>
+              <a:rPr lang="ja-JP" altLang="en-US" sz="3600" dirty="0"/>
+              <a:t>全員</a:t>
+            </a:r>
+            <a:r>
+              <a:rPr lang="ja-JP" altLang="en-US" sz="3600" dirty="0" smtClean="0"/>
+              <a:t>がゲームオーバーになりうるゲーム性</a:t>
+            </a:r>
+            <a:endParaRPr lang="en-US" altLang="ja-JP" sz="3600" dirty="0" smtClean="0"/>
+          </a:p>
+          <a:p>
+            <a:endParaRPr kumimoji="1" lang="en-US" altLang="ja-JP" sz="3600" dirty="0"/>
+          </a:p>
+          <a:p>
+            <a:r>
+              <a:rPr kumimoji="1" lang="ja-JP" altLang="en-US" sz="3600" dirty="0" smtClean="0"/>
+              <a:t>駆け引き要素</a:t>
+            </a:r>
+            <a:endParaRPr kumimoji="1" lang="en-US" altLang="ja-JP" sz="3600" dirty="0" smtClean="0"/>
+          </a:p>
+          <a:p>
+            <a:endParaRPr lang="en-US" altLang="ja-JP" sz="3600" dirty="0"/>
+          </a:p>
+          <a:p>
+            <a:r>
+              <a:rPr kumimoji="1" lang="ja-JP" altLang="en-US" sz="3600" dirty="0" smtClean="0"/>
+              <a:t>短時間で遊べる</a:t>
+            </a:r>
+            <a:endParaRPr kumimoji="1" lang="ja-JP" altLang="en-US" sz="3600" dirty="0"/>
+          </a:p>
+        </p:txBody>
+      </p:sp>
+    </p:spTree>
+    <p:extLst>
+      <p:ext uri="{BB962C8B-B14F-4D97-AF65-F5344CB8AC3E}">
+        <p14:creationId xmlns:p14="http://schemas.microsoft.com/office/powerpoint/2010/main" val="1753488276"/>
+      </p:ext>
+    </p:extLst>
+  </p:cSld>
+  <p:clrMapOvr>
+    <a:masterClrMapping/>
+  </p:clrMapOvr>
+</p:sld>
+</file>
+
+<file path=ppt/slides/slide4.xml><?xml version="1.0" encoding="utf-8"?>
+<p:sld xmlns:a="http://schemas.openxmlformats.org/drawingml/2006/main" xmlns:r="http://schemas.openxmlformats.org/officeDocument/2006/relationships" xmlns:p="http://schemas.openxmlformats.org/presentationml/2006/main">
+  <p:cSld>
+    <p:spTree>
+      <p:nvGrpSpPr>
+        <p:cNvPr id="1" name=""/>
+        <p:cNvGrpSpPr/>
+        <p:nvPr/>
+      </p:nvGrpSpPr>
+      <p:grpSpPr>
+        <a:xfrm>
+          <a:off x="0" y="0"/>
+          <a:ext cx="0" cy="0"/>
+          <a:chOff x="0" y="0"/>
+          <a:chExt cx="0" cy="0"/>
+        </a:xfrm>
+      </p:grpSpPr>
+      <p:sp>
+        <p:nvSpPr>
+          <p:cNvPr id="2" name="タイトル 1"/>
+          <p:cNvSpPr>
+            <a:spLocks noGrp="1"/>
+          </p:cNvSpPr>
+          <p:nvPr>
+            <p:ph type="title"/>
+          </p:nvPr>
+        </p:nvSpPr>
+        <p:spPr/>
+        <p:txBody>
+          <a:bodyPr/>
+          <a:lstStyle/>
+          <a:p>
+            <a:endParaRPr kumimoji="1" lang="ja-JP" altLang="en-US"/>
+          </a:p>
+        </p:txBody>
+      </p:sp>
+      <p:sp>
+        <p:nvSpPr>
+          <p:cNvPr id="3" name="コンテンツ プレースホルダー 2"/>
+          <p:cNvSpPr>
+            <a:spLocks noGrp="1"/>
+          </p:cNvSpPr>
+          <p:nvPr>
+            <p:ph idx="1"/>
+          </p:nvPr>
+        </p:nvSpPr>
+        <p:spPr/>
+        <p:txBody>
+          <a:bodyPr/>
+          <a:lstStyle/>
+          <a:p>
+            <a:endParaRPr kumimoji="1" lang="ja-JP" altLang="en-US"/>
+          </a:p>
+        </p:txBody>
+      </p:sp>
+    </p:spTree>
+    <p:extLst>
+      <p:ext uri="{BB962C8B-B14F-4D97-AF65-F5344CB8AC3E}">
+        <p14:creationId xmlns:p14="http://schemas.microsoft.com/office/powerpoint/2010/main" val="66174285"/>
       </p:ext>
     </p:extLst>
   </p:cSld>
